--- a/outputs/Abschlussprojekt_KI-gestützte Personalisierung im Marketing.pptx
+++ b/outputs/Abschlussprojekt_KI-gestützte Personalisierung im Marketing.pptx
@@ -22,7 +22,7 @@
     <p:sldId id="286" r:id="rId13"/>
     <p:sldId id="311" r:id="rId14"/>
     <p:sldId id="296" r:id="rId15"/>
-    <p:sldId id="289" r:id="rId16"/>
+    <p:sldId id="320" r:id="rId16"/>
     <p:sldId id="319" r:id="rId17"/>
   </p:sldIdLst>
   <p:sldSz cx="12192000" cy="6858000"/>
@@ -157,7 +157,7 @@
         </p14:section>
         <p14:section name="Fazit" id="{89576BCA-EEC4-4D61-88A3-E2F7B72B5602}">
           <p14:sldIdLst>
-            <p14:sldId id="289"/>
+            <p14:sldId id="320"/>
             <p14:sldId id="319"/>
           </p14:sldIdLst>
         </p14:section>
@@ -1449,6 +1449,27 @@
                 </c:ext>
                 <c:ext xmlns:c16="http://schemas.microsoft.com/office/drawing/2014/chart" uri="{C3380CC4-5D6E-409C-BE32-E72D297353CC}">
                   <c16:uniqueId val="{00000004-A05B-431A-82CD-F783BD18FB04}"/>
+                </c:ext>
+              </c:extLst>
+            </c:dLbl>
+            <c:dLbl>
+              <c:idx val="2"/>
+              <c:layout>
+                <c:manualLayout>
+                  <c:x val="0"/>
+                  <c:y val="2.7564532477313522E-3"/>
+                </c:manualLayout>
+              </c:layout>
+              <c:showLegendKey val="0"/>
+              <c:showVal val="1"/>
+              <c:showCatName val="0"/>
+              <c:showSerName val="0"/>
+              <c:showPercent val="0"/>
+              <c:showBubbleSize val="0"/>
+              <c:extLst>
+                <c:ext xmlns:c15="http://schemas.microsoft.com/office/drawing/2012/chart" uri="{CE6537A1-D6FC-4f65-9D91-7224C49458BB}"/>
+                <c:ext xmlns:c16="http://schemas.microsoft.com/office/drawing/2014/chart" uri="{C3380CC4-5D6E-409C-BE32-E72D297353CC}">
+                  <c16:uniqueId val="{00000005-A05B-431A-82CD-F783BD18FB04}"/>
                 </c:ext>
               </c:extLst>
             </c:dLbl>
@@ -4800,7 +4821,7 @@
           <a:p>
             <a:fld id="{271A480D-0252-4522-B0EF-2B597A2252A5}" type="datetimeFigureOut">
               <a:rPr lang="de-DE" smtClean="0"/>
-              <a:t>21.04.2026</a:t>
+              <a:t>28.04.2026</a:t>
             </a:fld>
             <a:endParaRPr lang="de-DE"/>
           </a:p>
@@ -5119,282 +5140,12 @@
                 <a:spcPts val="800"/>
               </a:spcAft>
             </a:pPr>
-            <a:r>
-              <a:rPr lang="de-DE" sz="1800" b="1" kern="100" dirty="0">
-                <a:effectLst/>
-                <a:latin typeface="Aptos" panose="020B0004020202020204" pitchFamily="34" charset="0"/>
-                <a:ea typeface="Aptos" panose="020B0004020202020204" pitchFamily="34" charset="0"/>
-                <a:cs typeface="Times New Roman" panose="02020603050405020304" pitchFamily="18" charset="0"/>
-              </a:rPr>
-              <a:t>Titel:</a:t>
-            </a:r>
-            <a:r>
-              <a:rPr lang="de-DE" sz="1800" kern="100" dirty="0">
-                <a:effectLst/>
-                <a:latin typeface="Aptos" panose="020B0004020202020204" pitchFamily="34" charset="0"/>
-                <a:ea typeface="Aptos" panose="020B0004020202020204" pitchFamily="34" charset="0"/>
-                <a:cs typeface="Times New Roman" panose="02020603050405020304" pitchFamily="18" charset="0"/>
-              </a:rPr>
-              <a:t> Projektdesign &amp; Setup: Struktur vor Modell</a:t>
-            </a:r>
-          </a:p>
-          <a:p>
-            <a:pPr>
-              <a:lnSpc>
-                <a:spcPct val="115000"/>
-              </a:lnSpc>
-              <a:spcAft>
-                <a:spcPts val="800"/>
-              </a:spcAft>
-            </a:pPr>
-            <a:r>
-              <a:rPr lang="de-DE" sz="1800" b="1" kern="100" dirty="0">
-                <a:effectLst/>
-                <a:latin typeface="Aptos" panose="020B0004020202020204" pitchFamily="34" charset="0"/>
-                <a:ea typeface="Aptos" panose="020B0004020202020204" pitchFamily="34" charset="0"/>
-                <a:cs typeface="Times New Roman" panose="02020603050405020304" pitchFamily="18" charset="0"/>
-              </a:rPr>
-              <a:t>APs &amp; Aufgaben clustern:</a:t>
-            </a:r>
-            <a:r>
-              <a:rPr lang="de-DE" sz="1800" kern="100" dirty="0">
-                <a:effectLst/>
-                <a:latin typeface="Aptos" panose="020B0004020202020204" pitchFamily="34" charset="0"/>
-                <a:ea typeface="Aptos" panose="020B0004020202020204" pitchFamily="34" charset="0"/>
-                <a:cs typeface="Times New Roman" panose="02020603050405020304" pitchFamily="18" charset="0"/>
-              </a:rPr>
-              <a:t> Arbeitspakete + klare Verantwortlichkeiten definiert</a:t>
-            </a:r>
-          </a:p>
-          <a:p>
-            <a:pPr>
-              <a:lnSpc>
-                <a:spcPct val="115000"/>
-              </a:lnSpc>
-              <a:spcAft>
-                <a:spcPts val="800"/>
-              </a:spcAft>
-            </a:pPr>
-            <a:r>
-              <a:rPr lang="de-DE" sz="1800" b="1" kern="100" dirty="0">
-                <a:effectLst/>
-                <a:latin typeface="Aptos" panose="020B0004020202020204" pitchFamily="34" charset="0"/>
-                <a:ea typeface="Aptos" panose="020B0004020202020204" pitchFamily="34" charset="0"/>
-                <a:cs typeface="Times New Roman" panose="02020603050405020304" pitchFamily="18" charset="0"/>
-              </a:rPr>
-              <a:t>Projektmanagement in Notion:</a:t>
-            </a:r>
-            <a:r>
-              <a:rPr lang="de-DE" sz="1800" kern="100" dirty="0">
-                <a:effectLst/>
-                <a:latin typeface="Aptos" panose="020B0004020202020204" pitchFamily="34" charset="0"/>
-                <a:ea typeface="Aptos" panose="020B0004020202020204" pitchFamily="34" charset="0"/>
-                <a:cs typeface="Times New Roman" panose="02020603050405020304" pitchFamily="18" charset="0"/>
-              </a:rPr>
-              <a:t> Aufgaben-DB + Statuspflege + regelmäßige </a:t>
-            </a:r>
-            <a:r>
-              <a:rPr lang="de-DE" sz="1800" kern="100" dirty="0" err="1">
-                <a:effectLst/>
-                <a:latin typeface="Aptos" panose="020B0004020202020204" pitchFamily="34" charset="0"/>
-                <a:ea typeface="Aptos" panose="020B0004020202020204" pitchFamily="34" charset="0"/>
-                <a:cs typeface="Times New Roman" panose="02020603050405020304" pitchFamily="18" charset="0"/>
-              </a:rPr>
-              <a:t>Huddles</a:t>
-            </a:r>
-            <a:r>
-              <a:rPr lang="de-DE" sz="1800" kern="100" dirty="0">
-                <a:effectLst/>
-                <a:latin typeface="Aptos" panose="020B0004020202020204" pitchFamily="34" charset="0"/>
-                <a:ea typeface="Aptos" panose="020B0004020202020204" pitchFamily="34" charset="0"/>
-                <a:cs typeface="Times New Roman" panose="02020603050405020304" pitchFamily="18" charset="0"/>
-              </a:rPr>
-              <a:t>/Updates</a:t>
-            </a:r>
-          </a:p>
-          <a:p>
-            <a:pPr>
-              <a:lnSpc>
-                <a:spcPct val="115000"/>
-              </a:lnSpc>
-              <a:spcAft>
-                <a:spcPts val="800"/>
-              </a:spcAft>
-            </a:pPr>
-            <a:r>
-              <a:rPr lang="de-DE" sz="1800" b="1" kern="100" dirty="0">
-                <a:effectLst/>
-                <a:latin typeface="Aptos" panose="020B0004020202020204" pitchFamily="34" charset="0"/>
-                <a:ea typeface="Aptos" panose="020B0004020202020204" pitchFamily="34" charset="0"/>
-                <a:cs typeface="Times New Roman" panose="02020603050405020304" pitchFamily="18" charset="0"/>
-              </a:rPr>
-              <a:t>Gemeinsames Arbeiten über GitHub:</a:t>
-            </a:r>
-            <a:r>
-              <a:rPr lang="de-DE" sz="1800" kern="100" dirty="0">
-                <a:effectLst/>
-                <a:latin typeface="Aptos" panose="020B0004020202020204" pitchFamily="34" charset="0"/>
-                <a:ea typeface="Aptos" panose="020B0004020202020204" pitchFamily="34" charset="0"/>
-                <a:cs typeface="Times New Roman" panose="02020603050405020304" pitchFamily="18" charset="0"/>
-              </a:rPr>
-              <a:t> Repo-Struktur, Versionierung, “</a:t>
-            </a:r>
-            <a:r>
-              <a:rPr lang="de-DE" sz="1800" kern="100" dirty="0" err="1">
-                <a:effectLst/>
-                <a:latin typeface="Aptos" panose="020B0004020202020204" pitchFamily="34" charset="0"/>
-                <a:ea typeface="Aptos" panose="020B0004020202020204" pitchFamily="34" charset="0"/>
-                <a:cs typeface="Times New Roman" panose="02020603050405020304" pitchFamily="18" charset="0"/>
-              </a:rPr>
-              <a:t>single</a:t>
-            </a:r>
-            <a:r>
-              <a:rPr lang="de-DE" sz="1800" kern="100" dirty="0">
-                <a:effectLst/>
-                <a:latin typeface="Aptos" panose="020B0004020202020204" pitchFamily="34" charset="0"/>
-                <a:ea typeface="Aptos" panose="020B0004020202020204" pitchFamily="34" charset="0"/>
-                <a:cs typeface="Times New Roman" panose="02020603050405020304" pitchFamily="18" charset="0"/>
-              </a:rPr>
-              <a:t> source </a:t>
-            </a:r>
-            <a:r>
-              <a:rPr lang="de-DE" sz="1800" kern="100" dirty="0" err="1">
-                <a:effectLst/>
-                <a:latin typeface="Aptos" panose="020B0004020202020204" pitchFamily="34" charset="0"/>
-                <a:ea typeface="Aptos" panose="020B0004020202020204" pitchFamily="34" charset="0"/>
-                <a:cs typeface="Times New Roman" panose="02020603050405020304" pitchFamily="18" charset="0"/>
-              </a:rPr>
-              <a:t>of</a:t>
-            </a:r>
-            <a:r>
-              <a:rPr lang="de-DE" sz="1800" kern="100" dirty="0">
-                <a:effectLst/>
-                <a:latin typeface="Aptos" panose="020B0004020202020204" pitchFamily="34" charset="0"/>
-                <a:ea typeface="Aptos" panose="020B0004020202020204" pitchFamily="34" charset="0"/>
-                <a:cs typeface="Times New Roman" panose="02020603050405020304" pitchFamily="18" charset="0"/>
-              </a:rPr>
-              <a:t> </a:t>
-            </a:r>
-            <a:r>
-              <a:rPr lang="de-DE" sz="1800" kern="100" dirty="0" err="1">
-                <a:effectLst/>
-                <a:latin typeface="Aptos" panose="020B0004020202020204" pitchFamily="34" charset="0"/>
-                <a:ea typeface="Aptos" panose="020B0004020202020204" pitchFamily="34" charset="0"/>
-                <a:cs typeface="Times New Roman" panose="02020603050405020304" pitchFamily="18" charset="0"/>
-              </a:rPr>
-              <a:t>data</a:t>
-            </a:r>
-            <a:r>
-              <a:rPr lang="de-DE" sz="1800" kern="100" dirty="0">
-                <a:effectLst/>
-                <a:latin typeface="Aptos" panose="020B0004020202020204" pitchFamily="34" charset="0"/>
-                <a:ea typeface="Aptos" panose="020B0004020202020204" pitchFamily="34" charset="0"/>
-                <a:cs typeface="Times New Roman" panose="02020603050405020304" pitchFamily="18" charset="0"/>
-              </a:rPr>
-              <a:t>”</a:t>
-            </a:r>
-          </a:p>
-          <a:p>
-            <a:pPr>
-              <a:lnSpc>
-                <a:spcPct val="115000"/>
-              </a:lnSpc>
-              <a:spcAft>
-                <a:spcPts val="800"/>
-              </a:spcAft>
-            </a:pPr>
-            <a:r>
-              <a:rPr lang="de-DE" sz="1800" b="1" kern="100" dirty="0">
-                <a:effectLst/>
-                <a:latin typeface="Aptos" panose="020B0004020202020204" pitchFamily="34" charset="0"/>
-                <a:ea typeface="Aptos" panose="020B0004020202020204" pitchFamily="34" charset="0"/>
-                <a:cs typeface="Times New Roman" panose="02020603050405020304" pitchFamily="18" charset="0"/>
-              </a:rPr>
-              <a:t>Datenstrategie:</a:t>
-            </a:r>
-            <a:r>
-              <a:rPr lang="de-DE" sz="1800" kern="100" dirty="0">
-                <a:effectLst/>
-                <a:latin typeface="Aptos" panose="020B0004020202020204" pitchFamily="34" charset="0"/>
-                <a:ea typeface="Aptos" panose="020B0004020202020204" pitchFamily="34" charset="0"/>
-                <a:cs typeface="Times New Roman" panose="02020603050405020304" pitchFamily="18" charset="0"/>
-              </a:rPr>
-              <a:t> bewusst </a:t>
-            </a:r>
-            <a:r>
-              <a:rPr lang="de-DE" sz="1800" b="1" kern="100" dirty="0">
-                <a:effectLst/>
-                <a:latin typeface="Aptos" panose="020B0004020202020204" pitchFamily="34" charset="0"/>
-                <a:ea typeface="Aptos" panose="020B0004020202020204" pitchFamily="34" charset="0"/>
-                <a:cs typeface="Times New Roman" panose="02020603050405020304" pitchFamily="18" charset="0"/>
-              </a:rPr>
-              <a:t>große, aussagekräftige Datensätze</a:t>
-            </a:r>
-            <a:r>
-              <a:rPr lang="de-DE" sz="1800" kern="100" dirty="0">
-                <a:effectLst/>
-                <a:latin typeface="Aptos" panose="020B0004020202020204" pitchFamily="34" charset="0"/>
-                <a:ea typeface="Aptos" panose="020B0004020202020204" pitchFamily="34" charset="0"/>
-                <a:cs typeface="Times New Roman" panose="02020603050405020304" pitchFamily="18" charset="0"/>
-              </a:rPr>
-              <a:t> gesucht</a:t>
-            </a:r>
-          </a:p>
-          <a:p>
-            <a:pPr>
-              <a:lnSpc>
-                <a:spcPct val="115000"/>
-              </a:lnSpc>
-              <a:spcAft>
-                <a:spcPts val="800"/>
-              </a:spcAft>
-            </a:pPr>
-            <a:r>
-              <a:rPr lang="de-DE" sz="1800" b="1" kern="100" dirty="0">
-                <a:effectLst/>
-                <a:latin typeface="Aptos" panose="020B0004020202020204" pitchFamily="34" charset="0"/>
-                <a:ea typeface="Aptos" panose="020B0004020202020204" pitchFamily="34" charset="0"/>
-                <a:cs typeface="Times New Roman" panose="02020603050405020304" pitchFamily="18" charset="0"/>
-              </a:rPr>
-              <a:t>Ergebnis Datenwahl:</a:t>
-            </a:r>
-            <a:r>
-              <a:rPr lang="de-DE" sz="1800" kern="100" dirty="0">
-                <a:effectLst/>
-                <a:latin typeface="Aptos" panose="020B0004020202020204" pitchFamily="34" charset="0"/>
-                <a:ea typeface="Aptos" panose="020B0004020202020204" pitchFamily="34" charset="0"/>
-                <a:cs typeface="Times New Roman" panose="02020603050405020304" pitchFamily="18" charset="0"/>
-              </a:rPr>
-              <a:t> GA4 E-Commerce + Bank Marketing Dataset</a:t>
-            </a:r>
-          </a:p>
-          <a:p>
-            <a:pPr>
-              <a:lnSpc>
-                <a:spcPct val="115000"/>
-              </a:lnSpc>
-              <a:spcAft>
-                <a:spcPts val="800"/>
-              </a:spcAft>
-            </a:pPr>
-            <a:r>
-              <a:rPr lang="de-DE" sz="1800" b="1" kern="100" dirty="0">
-                <a:effectLst/>
-                <a:latin typeface="Aptos" panose="020B0004020202020204" pitchFamily="34" charset="0"/>
-                <a:ea typeface="Aptos" panose="020B0004020202020204" pitchFamily="34" charset="0"/>
-                <a:cs typeface="Times New Roman" panose="02020603050405020304" pitchFamily="18" charset="0"/>
-              </a:rPr>
-              <a:t>EDA:</a:t>
-            </a:r>
-            <a:r>
-              <a:rPr lang="de-DE" sz="1800" kern="100" dirty="0">
-                <a:effectLst/>
-                <a:latin typeface="Aptos" panose="020B0004020202020204" pitchFamily="34" charset="0"/>
-                <a:ea typeface="Aptos" panose="020B0004020202020204" pitchFamily="34" charset="0"/>
-                <a:cs typeface="Times New Roman" panose="02020603050405020304" pitchFamily="18" charset="0"/>
-              </a:rPr>
-              <a:t> macht Hadi (führt in bereinigte/strukturierte Analyse-Daten über)</a:t>
-            </a:r>
+            <a:endParaRPr lang="de-DE" sz="1800" kern="100" dirty="0">
+              <a:effectLst/>
+              <a:latin typeface="Aptos" panose="020B0004020202020204" pitchFamily="34" charset="0"/>
+              <a:ea typeface="Aptos" panose="020B0004020202020204" pitchFamily="34" charset="0"/>
+              <a:cs typeface="Times New Roman" panose="02020603050405020304" pitchFamily="18" charset="0"/>
+            </a:endParaRPr>
           </a:p>
         </p:txBody>
       </p:sp>
@@ -5425,263 +5176,6 @@
     <p:extLst>
       <p:ext uri="{BB962C8B-B14F-4D97-AF65-F5344CB8AC3E}">
         <p14:creationId xmlns:p14="http://schemas.microsoft.com/office/powerpoint/2010/main" val="1657782610"/>
-      </p:ext>
-    </p:extLst>
-  </p:cSld>
-  <p:clrMapOvr>
-    <a:masterClrMapping/>
-  </p:clrMapOvr>
-</p:notes>
-</file>
-
-<file path=ppt/notesSlides/notesSlide10.xml><?xml version="1.0" encoding="utf-8"?>
-<p:notes xmlns:a="http://schemas.openxmlformats.org/drawingml/2006/main" xmlns:r="http://schemas.openxmlformats.org/officeDocument/2006/relationships" xmlns:p="http://schemas.openxmlformats.org/presentationml/2006/main">
-  <p:cSld>
-    <p:spTree>
-      <p:nvGrpSpPr>
-        <p:cNvPr id="1" name=""/>
-        <p:cNvGrpSpPr/>
-        <p:nvPr/>
-      </p:nvGrpSpPr>
-      <p:grpSpPr>
-        <a:xfrm>
-          <a:off x="0" y="0"/>
-          <a:ext cx="0" cy="0"/>
-          <a:chOff x="0" y="0"/>
-          <a:chExt cx="0" cy="0"/>
-        </a:xfrm>
-      </p:grpSpPr>
-      <p:sp>
-        <p:nvSpPr>
-          <p:cNvPr id="2" name="Folienbildplatzhalter 1"/>
-          <p:cNvSpPr>
-            <a:spLocks noGrp="1" noRot="1" noChangeAspect="1"/>
-          </p:cNvSpPr>
-          <p:nvPr>
-            <p:ph type="sldImg"/>
-          </p:nvPr>
-        </p:nvSpPr>
-        <p:spPr/>
-      </p:sp>
-      <p:sp>
-        <p:nvSpPr>
-          <p:cNvPr id="3" name="Notizenplatzhalter 2"/>
-          <p:cNvSpPr>
-            <a:spLocks noGrp="1"/>
-          </p:cNvSpPr>
-          <p:nvPr>
-            <p:ph type="body" idx="1"/>
-          </p:nvPr>
-        </p:nvSpPr>
-        <p:spPr/>
-        <p:txBody>
-          <a:bodyPr/>
-          <a:lstStyle/>
-          <a:p>
-            <a:pPr algn="l"/>
-            <a:r>
-              <a:rPr lang="de-DE" b="0" i="0" dirty="0">
-                <a:effectLst/>
-                <a:latin typeface="system-ui"/>
-              </a:rPr>
-              <a:t>Aus den Ergebnissen lassen sich mehrere konkrete Empfehlungen für Unternehmen ableiten:</a:t>
-            </a:r>
-          </a:p>
-          <a:p>
-            <a:pPr algn="l"/>
-            <a:r>
-              <a:rPr lang="de-DE" b="1" i="0" dirty="0">
-                <a:effectLst/>
-                <a:latin typeface="system-ui"/>
-              </a:rPr>
-              <a:t>1. Segmentbasierte Personalisierung gezielt einsetzen</a:t>
-            </a:r>
-            <a:br>
-              <a:rPr lang="de-DE" b="0" i="0" dirty="0">
-                <a:effectLst/>
-                <a:latin typeface="system-ui"/>
-              </a:rPr>
-            </a:br>
-            <a:r>
-              <a:rPr lang="de-DE" b="0" i="0" dirty="0">
-                <a:effectLst/>
-                <a:latin typeface="system-ui"/>
-              </a:rPr>
-              <a:t>Segmentbasierte Ansätze bieten einen hohen Mehrwert bei vergleichsweise geringem Risiko. Sie stellen daher in vielen Fällen den optimalen Einstieg in datengetriebenes Marketing dar.</a:t>
-            </a:r>
-          </a:p>
-          <a:p>
-            <a:pPr algn="l"/>
-            <a:r>
-              <a:rPr lang="de-DE" b="1" i="0" dirty="0">
-                <a:effectLst/>
-                <a:latin typeface="system-ui"/>
-              </a:rPr>
-              <a:t>2. Individuelle Modelle nur unter klaren Rahmenbedingungen nutzen</a:t>
-            </a:r>
-            <a:br>
-              <a:rPr lang="de-DE" b="0" i="0" dirty="0">
-                <a:effectLst/>
-                <a:latin typeface="system-ui"/>
-              </a:rPr>
-            </a:br>
-            <a:r>
-              <a:rPr lang="de-DE" b="0" i="0" dirty="0">
-                <a:effectLst/>
-                <a:latin typeface="system-ui"/>
-              </a:rPr>
-              <a:t>Individuelle Vorhersagemodelle sollten nur dann eingesetzt werden, wenn eine klare rechtliche Grundlage, transparente Kommunikation und geeignete </a:t>
-            </a:r>
-            <a:r>
-              <a:rPr lang="de-DE" b="0" i="0" dirty="0" err="1">
-                <a:effectLst/>
-                <a:latin typeface="system-ui"/>
-              </a:rPr>
-              <a:t>Governance</a:t>
-            </a:r>
-            <a:r>
-              <a:rPr lang="de-DE" b="0" i="0" dirty="0">
-                <a:effectLst/>
-                <a:latin typeface="system-ui"/>
-              </a:rPr>
-              <a:t>-Strukturen vorhanden sind.</a:t>
-            </a:r>
-          </a:p>
-          <a:p>
-            <a:pPr algn="l"/>
-            <a:r>
-              <a:rPr lang="de-DE" b="1" i="0" dirty="0">
-                <a:effectLst/>
-                <a:latin typeface="system-ui"/>
-              </a:rPr>
-              <a:t>3. Datenschutz frühzeitig integrieren (Privacy </a:t>
-            </a:r>
-            <a:r>
-              <a:rPr lang="de-DE" b="1" i="0" dirty="0" err="1">
-                <a:effectLst/>
-                <a:latin typeface="system-ui"/>
-              </a:rPr>
-              <a:t>by</a:t>
-            </a:r>
-            <a:r>
-              <a:rPr lang="de-DE" b="1" i="0" dirty="0">
-                <a:effectLst/>
-                <a:latin typeface="system-ui"/>
-              </a:rPr>
-              <a:t> Design)</a:t>
-            </a:r>
-            <a:br>
-              <a:rPr lang="de-DE" b="0" i="0" dirty="0">
-                <a:effectLst/>
-                <a:latin typeface="system-ui"/>
-              </a:rPr>
-            </a:br>
-            <a:r>
-              <a:rPr lang="de-DE" b="0" i="0" dirty="0">
-                <a:effectLst/>
-                <a:latin typeface="system-ui"/>
-              </a:rPr>
-              <a:t>Datenschutz sollte nicht erst nachträglich berücksichtigt werden, sondern bereits bei der Entwicklung von Modellen und Kampagnen eine zentrale Rolle spielen.</a:t>
-            </a:r>
-          </a:p>
-          <a:p>
-            <a:pPr algn="l"/>
-            <a:r>
-              <a:rPr lang="de-DE" b="1" i="0" dirty="0">
-                <a:effectLst/>
-                <a:latin typeface="system-ui"/>
-              </a:rPr>
-              <a:t>4. Transparenz gegenüber Nutzern erhöhen</a:t>
-            </a:r>
-            <a:br>
-              <a:rPr lang="de-DE" b="0" i="0" dirty="0">
-                <a:effectLst/>
-                <a:latin typeface="system-ui"/>
-              </a:rPr>
-            </a:br>
-            <a:r>
-              <a:rPr lang="de-DE" b="0" i="0" dirty="0">
-                <a:effectLst/>
-                <a:latin typeface="system-ui"/>
-              </a:rPr>
-              <a:t>Nutzer sollten nachvollziehen können, warum sie bestimmte Inhalte oder Angebote erhalten. Dies stärkt Vertrauen und reduziert regulatorische Risiken.</a:t>
-            </a:r>
-          </a:p>
-          <a:p>
-            <a:pPr algn="l"/>
-            <a:r>
-              <a:rPr lang="de-DE" b="1" i="0" dirty="0">
-                <a:effectLst/>
-                <a:latin typeface="system-ui"/>
-              </a:rPr>
-              <a:t>5. Datenumfang bewusst begrenzen (Datensparsamkeit)</a:t>
-            </a:r>
-            <a:br>
-              <a:rPr lang="de-DE" b="0" i="0" dirty="0">
-                <a:effectLst/>
-                <a:latin typeface="system-ui"/>
-              </a:rPr>
-            </a:br>
-            <a:r>
-              <a:rPr lang="de-DE" b="0" i="0" dirty="0">
-                <a:effectLst/>
-                <a:latin typeface="system-ui"/>
-              </a:rPr>
-              <a:t>Nicht jede verfügbare Information sollte genutzt werden. Eine gezielte Auswahl relevanter Merkmale kann helfen, das Risiko zu reduzieren, ohne die Performance wesentlich zu beeinträchtigen.</a:t>
-            </a:r>
-          </a:p>
-          <a:p>
-            <a:pPr algn="l"/>
-            <a:r>
-              <a:rPr lang="de-DE" b="1" i="0" dirty="0">
-                <a:effectLst/>
-                <a:latin typeface="system-ui"/>
-              </a:rPr>
-              <a:t>6. Trade-off aktiv managen</a:t>
-            </a:r>
-            <a:br>
-              <a:rPr lang="de-DE" b="0" i="0" dirty="0">
-                <a:effectLst/>
-                <a:latin typeface="system-ui"/>
-              </a:rPr>
-            </a:br>
-            <a:r>
-              <a:rPr lang="de-DE" b="0" i="0" dirty="0">
-                <a:effectLst/>
-                <a:latin typeface="system-ui"/>
-              </a:rPr>
-              <a:t>Unternehmen sollten Personalisierung nicht maximal, sondern optimal einsetzen. Ziel ist es, ein Gleichgewicht zwischen Nutzen und Risiko zu finden.</a:t>
-            </a:r>
-          </a:p>
-        </p:txBody>
-      </p:sp>
-      <p:sp>
-        <p:nvSpPr>
-          <p:cNvPr id="4" name="Foliennummernplatzhalter 3"/>
-          <p:cNvSpPr>
-            <a:spLocks noGrp="1"/>
-          </p:cNvSpPr>
-          <p:nvPr>
-            <p:ph type="sldNum" sz="quarter" idx="5"/>
-          </p:nvPr>
-        </p:nvSpPr>
-        <p:spPr/>
-        <p:txBody>
-          <a:bodyPr/>
-          <a:lstStyle/>
-          <a:p>
-            <a:fld id="{C8A6D911-81B8-41B3-9BA6-32D4E1373D9C}" type="slidenum">
-              <a:rPr lang="de-DE" smtClean="0"/>
-              <a:t>15</a:t>
-            </a:fld>
-            <a:endParaRPr lang="de-DE"/>
-          </a:p>
-        </p:txBody>
-      </p:sp>
-    </p:spTree>
-    <p:extLst>
-      <p:ext uri="{BB962C8B-B14F-4D97-AF65-F5344CB8AC3E}">
-        <p14:creationId xmlns:p14="http://schemas.microsoft.com/office/powerpoint/2010/main" val="3999688471"/>
       </p:ext>
     </p:extLst>
   </p:cSld>
@@ -5735,26 +5229,7 @@
           <a:bodyPr/>
           <a:lstStyle/>
           <a:p>
-            <a:r>
-              <a:rPr lang="de-DE" dirty="0"/>
-              <a:t>„Nach der Segmentierung wollten wir im nächsten Schritt nicht nur Gruppen verstehen, sondern direkt vorhersagen, welche Kunden auf eine Kampagne reagieren. Dafür haben wir ein </a:t>
-            </a:r>
-            <a:r>
-              <a:rPr lang="de-DE" dirty="0" err="1"/>
-              <a:t>Logistic</a:t>
-            </a:r>
-            <a:r>
-              <a:rPr lang="de-DE" dirty="0"/>
-              <a:t>-Regression-Modell auf dem Bank-Marketing-Datensatz trainiert. Insgesamt wurden 20 Merkmale verwendet, die mit einer sauberen Pipeline aus Skalierung und </a:t>
-            </a:r>
-            <a:r>
-              <a:rPr lang="de-DE" dirty="0" err="1"/>
-              <a:t>One</a:t>
-            </a:r>
-            <a:r>
-              <a:rPr lang="de-DE" dirty="0"/>
-              <a:t>-Hot-Encoding verarbeitet wurden.“</a:t>
-            </a:r>
+            <a:endParaRPr lang="de-DE" dirty="0"/>
           </a:p>
         </p:txBody>
       </p:sp>
@@ -5838,10 +5313,7 @@
           <a:bodyPr/>
           <a:lstStyle/>
           <a:p>
-            <a:r>
-              <a:rPr lang="de-DE" dirty="0"/>
-              <a:t>„Die wichtigste Kennzahl hier ist die AUC von 94,3 Prozent. Das zeigt, dass das Modell sehr gut zwischen reaktiven und nicht reaktiven Kunden unterscheiden kann. Gleichzeitig sehen wir an der Precision, dass nicht jede positive Vorhersage auch tatsächlich zutrifft. Das Modell ist also stark, aber nicht fehlerfrei.“</a:t>
-            </a:r>
+            <a:endParaRPr lang="de-DE" dirty="0"/>
           </a:p>
         </p:txBody>
       </p:sp>
@@ -5925,18 +5397,7 @@
           <a:bodyPr/>
           <a:lstStyle/>
           <a:p>
-            <a:r>
-              <a:rPr lang="de-DE" dirty="0"/>
-              <a:t>„Ein großer Vorteil der </a:t>
-            </a:r>
-            <a:r>
-              <a:rPr lang="de-DE" dirty="0" err="1"/>
-              <a:t>Logistic</a:t>
-            </a:r>
-            <a:r>
-              <a:rPr lang="de-DE" dirty="0"/>
-              <a:t> Regression ist ihre Interpretierbarkeit. Wir können also nachvollziehen, welche Faktoren die Wahrscheinlichkeit einer positiven Reaktion besonders stark beeinflussen. Das ist wichtig, weil wir dadurch nicht nur bessere Vorhersagen erhalten, sondern auch verstehen, worauf die Entscheidung des Modells basiert.“</a:t>
-            </a:r>
+            <a:endParaRPr lang="de-DE" dirty="0"/>
           </a:p>
         </p:txBody>
       </p:sp>
@@ -6020,18 +5481,7 @@
           <a:bodyPr/>
           <a:lstStyle/>
           <a:p>
-            <a:r>
-              <a:rPr lang="de-DE" dirty="0"/>
-              <a:t>„Für H2 haben wir untersucht, ob Personalisierung nicht nur die </a:t>
-            </a:r>
-            <a:r>
-              <a:rPr lang="de-DE" dirty="0" err="1"/>
-              <a:t>Conversion</a:t>
-            </a:r>
-            <a:r>
-              <a:rPr lang="de-DE" dirty="0"/>
-              <a:t>, sondern auch die Relevanz von Empfehlungen verbessert. Genau das sehen wir hier: Die Precision@5 steigt von 0.0074 auf 0.2331. Das bedeutet, dass segmentbasierte Empfehlungen deutlich häufiger tatsächlich relevante Produkte enthalten.“</a:t>
-            </a:r>
+            <a:endParaRPr lang="de-DE" dirty="0"/>
           </a:p>
         </p:txBody>
       </p:sp>
@@ -6115,68 +5565,7 @@
           <a:bodyPr/>
           <a:lstStyle/>
           <a:p>
-            <a:r>
-              <a:rPr lang="de-DE" dirty="0"/>
-              <a:t>„Wir haben gesehen, dass Personalisierung die Performance deutlich verbessert.</a:t>
-            </a:r>
-            <a:br>
-              <a:rPr lang="de-DE" dirty="0"/>
-            </a:br>
-            <a:r>
-              <a:rPr lang="de-DE" dirty="0"/>
-              <a:t>Aber die zentrale Frage ist: Was kostet das aus Datenschutzsicht?</a:t>
-            </a:r>
-            <a:br>
-              <a:rPr lang="de-DE" dirty="0"/>
-            </a:br>
-            <a:r>
-              <a:rPr lang="de-DE" dirty="0"/>
-              <a:t>Mit zunehmender Personalisierung nutzen wir mehr Daten, erstellen detailliertere Profile und treffen automatisierte Entscheidungen.</a:t>
-            </a:r>
-            <a:br>
-              <a:rPr lang="de-DE" dirty="0"/>
-            </a:br>
-            <a:r>
-              <a:rPr lang="de-DE" dirty="0"/>
-              <a:t>Genau hier setzt die DSGVO an – insbesondere Artikel 22, der solche Entscheidungen kritisch bewertet.</a:t>
-            </a:r>
-            <a:br>
-              <a:rPr lang="de-DE" dirty="0"/>
-            </a:br>
-            <a:r>
-              <a:rPr lang="de-DE" dirty="0"/>
-              <a:t>Die EDPB-Leitlinien definieren </a:t>
-            </a:r>
-            <a:r>
-              <a:rPr lang="de-DE" dirty="0" err="1"/>
-              <a:t>Profiling</a:t>
-            </a:r>
-            <a:r>
-              <a:rPr lang="de-DE" dirty="0"/>
-              <a:t> als die Bewertung persönlicher Eigenschaften und machen deutlich, dass das Risiko mit der Detailtiefe steigt.</a:t>
-            </a:r>
-            <a:br>
-              <a:rPr lang="de-DE" dirty="0"/>
-            </a:br>
-            <a:r>
-              <a:rPr lang="de-DE" dirty="0"/>
-              <a:t>Zusätzlich betont die ICO-</a:t>
-            </a:r>
-            <a:r>
-              <a:rPr lang="de-DE" dirty="0" err="1"/>
-              <a:t>Guidance</a:t>
-            </a:r>
-            <a:r>
-              <a:rPr lang="de-DE" dirty="0"/>
-              <a:t> Prinzipien wie Transparenz und Fairness.</a:t>
-            </a:r>
-            <a:br>
-              <a:rPr lang="de-DE" dirty="0"/>
-            </a:br>
-            <a:r>
-              <a:rPr lang="de-DE" dirty="0"/>
-              <a:t>Die zentrale Erkenntnis ist daher: Je individueller die Personalisierung, desto höher das Datenschutzrisiko.“</a:t>
-            </a:r>
+            <a:endParaRPr lang="de-DE" dirty="0"/>
           </a:p>
         </p:txBody>
       </p:sp>
@@ -6260,31 +5649,7 @@
           <a:bodyPr/>
           <a:lstStyle/>
           <a:p>
-            <a:r>
-              <a:rPr lang="de-DE" dirty="0"/>
-              <a:t>„Für die Analyse unterscheiden wir drei Stufen der Personalisierung.</a:t>
-            </a:r>
-            <a:br>
-              <a:rPr lang="de-DE" dirty="0"/>
-            </a:br>
-            <a:r>
-              <a:rPr lang="de-DE" dirty="0"/>
-              <a:t>Ganz links haben wir generische Ansprache ohne individuelle Daten.</a:t>
-            </a:r>
-            <a:br>
-              <a:rPr lang="de-DE" dirty="0"/>
-            </a:br>
-            <a:r>
-              <a:rPr lang="de-DE" dirty="0"/>
-              <a:t>In der Mitte segmentbasierte Ansätze, bei denen Nutzer in Gruppen eingeteilt werden.</a:t>
-            </a:r>
-            <a:br>
-              <a:rPr lang="de-DE" dirty="0"/>
-            </a:br>
-            <a:r>
-              <a:rPr lang="de-DE" dirty="0"/>
-              <a:t>Und rechts individuelle Modelle, die für jede einzelne Person eine Vorhersage treffen.“</a:t>
-            </a:r>
+            <a:endParaRPr lang="de-DE" dirty="0"/>
           </a:p>
         </p:txBody>
       </p:sp>
@@ -6368,39 +5733,7 @@
           <a:bodyPr/>
           <a:lstStyle/>
           <a:p>
-            <a:r>
-              <a:rPr lang="de-DE" dirty="0"/>
-              <a:t>„Um das Datenschutzrisiko zu bewerten, haben wir einen eigenen Risk Score entwickelt.</a:t>
-            </a:r>
-            <a:br>
-              <a:rPr lang="de-DE" dirty="0"/>
-            </a:br>
-            <a:r>
-              <a:rPr lang="de-DE" dirty="0"/>
-              <a:t>Dieser basiert auf drei Faktoren: dem Umfang der Daten, ihrer Sensitivität und dem Grad der Individualisierung.</a:t>
-            </a:r>
-            <a:br>
-              <a:rPr lang="de-DE" dirty="0"/>
-            </a:br>
-            <a:r>
-              <a:rPr lang="de-DE" dirty="0"/>
-              <a:t>Besonders wichtig ist dabei die </a:t>
-            </a:r>
-            <a:r>
-              <a:rPr lang="de-DE" dirty="0" err="1"/>
-              <a:t>Granularity</a:t>
-            </a:r>
-            <a:r>
-              <a:rPr lang="de-DE" dirty="0"/>
-              <a:t>, also wie individuell die Ansprache ist.</a:t>
-            </a:r>
-            <a:br>
-              <a:rPr lang="de-DE" dirty="0"/>
-            </a:br>
-            <a:r>
-              <a:rPr lang="de-DE" dirty="0"/>
-              <a:t>Wie man hier sieht, steigt das Risiko deutlich von generischen Ansätzen bis hin zu individuellen Modellen.“</a:t>
-            </a:r>
+            <a:endParaRPr lang="de-DE" dirty="0"/>
           </a:p>
         </p:txBody>
       </p:sp>
@@ -6484,38 +5817,7 @@
           <a:bodyPr/>
           <a:lstStyle/>
           <a:p>
-            <a:r>
-              <a:rPr lang="de-DE" dirty="0"/>
-              <a:t>„Wir sehen hier den Zusammenhang zwischen Personalisierung und Performance.</a:t>
-            </a:r>
-            <a:br>
-              <a:rPr lang="de-DE" dirty="0"/>
-            </a:br>
-            <a:r>
-              <a:rPr lang="de-DE" dirty="0"/>
-              <a:t>Mit steigender Personalisierung verbessert sich die Performance deutlich.</a:t>
-            </a:r>
-            <a:br>
-              <a:rPr lang="de-DE" dirty="0"/>
-            </a:br>
-            <a:r>
-              <a:rPr lang="de-DE" dirty="0"/>
-              <a:t>Allerdings steigt gleichzeitig das Datenschutzrisiko stark an.</a:t>
-            </a:r>
-            <a:br>
-              <a:rPr lang="de-DE" dirty="0"/>
-            </a:br>
-            <a:r>
-              <a:rPr lang="de-DE" dirty="0"/>
-              <a:t>Ab einem Risk Score von etwa 0.7 erreichen wir einen kritischen Bereich im Sinne der DSGVO.</a:t>
-            </a:r>
-            <a:br>
-              <a:rPr lang="de-DE" dirty="0"/>
-            </a:br>
-            <a:r>
-              <a:rPr lang="de-DE" dirty="0"/>
-              <a:t>Der optimale Punkt liegt daher im Bereich der segmentbasierten Ansätze.“</a:t>
-            </a:r>
+            <a:endParaRPr lang="de-DE" dirty="0"/>
           </a:p>
         </p:txBody>
       </p:sp>
@@ -6702,7 +6004,7 @@
           <a:p>
             <a:fld id="{5B7A6D87-A654-40B7-AB74-6B9E6A20D7F1}" type="datetimeFigureOut">
               <a:rPr lang="de-DE" smtClean="0"/>
-              <a:t>21.04.2026</a:t>
+              <a:t>28.04.2026</a:t>
             </a:fld>
             <a:endParaRPr lang="de-DE"/>
           </a:p>
@@ -6900,7 +6202,7 @@
           <a:p>
             <a:fld id="{5B7A6D87-A654-40B7-AB74-6B9E6A20D7F1}" type="datetimeFigureOut">
               <a:rPr lang="de-DE" smtClean="0"/>
-              <a:t>21.04.2026</a:t>
+              <a:t>28.04.2026</a:t>
             </a:fld>
             <a:endParaRPr lang="de-DE"/>
           </a:p>
@@ -7108,7 +6410,7 @@
           <a:p>
             <a:fld id="{5B7A6D87-A654-40B7-AB74-6B9E6A20D7F1}" type="datetimeFigureOut">
               <a:rPr lang="de-DE" smtClean="0"/>
-              <a:t>21.04.2026</a:t>
+              <a:t>28.04.2026</a:t>
             </a:fld>
             <a:endParaRPr lang="de-DE"/>
           </a:p>
@@ -7306,7 +6608,7 @@
           <a:p>
             <a:fld id="{5B7A6D87-A654-40B7-AB74-6B9E6A20D7F1}" type="datetimeFigureOut">
               <a:rPr lang="de-DE" smtClean="0"/>
-              <a:t>21.04.2026</a:t>
+              <a:t>28.04.2026</a:t>
             </a:fld>
             <a:endParaRPr lang="de-DE"/>
           </a:p>
@@ -7597,7 +6899,7 @@
           <a:p>
             <a:fld id="{5B7A6D87-A654-40B7-AB74-6B9E6A20D7F1}" type="datetimeFigureOut">
               <a:rPr lang="de-DE" smtClean="0"/>
-              <a:t>21.04.2026</a:t>
+              <a:t>28.04.2026</a:t>
             </a:fld>
             <a:endParaRPr lang="de-DE"/>
           </a:p>
@@ -7862,7 +7164,7 @@
           <a:p>
             <a:fld id="{5B7A6D87-A654-40B7-AB74-6B9E6A20D7F1}" type="datetimeFigureOut">
               <a:rPr lang="de-DE" smtClean="0"/>
-              <a:t>21.04.2026</a:t>
+              <a:t>28.04.2026</a:t>
             </a:fld>
             <a:endParaRPr lang="de-DE"/>
           </a:p>
@@ -8274,7 +7576,7 @@
           <a:p>
             <a:fld id="{5B7A6D87-A654-40B7-AB74-6B9E6A20D7F1}" type="datetimeFigureOut">
               <a:rPr lang="de-DE" smtClean="0"/>
-              <a:t>21.04.2026</a:t>
+              <a:t>28.04.2026</a:t>
             </a:fld>
             <a:endParaRPr lang="de-DE"/>
           </a:p>
@@ -8415,7 +7717,7 @@
           <a:p>
             <a:fld id="{5B7A6D87-A654-40B7-AB74-6B9E6A20D7F1}" type="datetimeFigureOut">
               <a:rPr lang="de-DE" smtClean="0"/>
-              <a:t>21.04.2026</a:t>
+              <a:t>28.04.2026</a:t>
             </a:fld>
             <a:endParaRPr lang="de-DE"/>
           </a:p>
@@ -8528,7 +7830,7 @@
           <a:p>
             <a:fld id="{5B7A6D87-A654-40B7-AB74-6B9E6A20D7F1}" type="datetimeFigureOut">
               <a:rPr lang="de-DE" smtClean="0"/>
-              <a:t>21.04.2026</a:t>
+              <a:t>28.04.2026</a:t>
             </a:fld>
             <a:endParaRPr lang="de-DE"/>
           </a:p>
@@ -8839,7 +8141,7 @@
           <a:p>
             <a:fld id="{5B7A6D87-A654-40B7-AB74-6B9E6A20D7F1}" type="datetimeFigureOut">
               <a:rPr lang="de-DE" smtClean="0"/>
-              <a:t>21.04.2026</a:t>
+              <a:t>28.04.2026</a:t>
             </a:fld>
             <a:endParaRPr lang="de-DE"/>
           </a:p>
@@ -9127,7 +8429,7 @@
           <a:p>
             <a:fld id="{5B7A6D87-A654-40B7-AB74-6B9E6A20D7F1}" type="datetimeFigureOut">
               <a:rPr lang="de-DE" smtClean="0"/>
-              <a:t>21.04.2026</a:t>
+              <a:t>28.04.2026</a:t>
             </a:fld>
             <a:endParaRPr lang="de-DE"/>
           </a:p>
@@ -9372,7 +8674,7 @@
             <a:fld id="{5B7A6D87-A654-40B7-AB74-6B9E6A20D7F1}" type="datetimeFigureOut">
               <a:rPr lang="de-DE" smtClean="0"/>
               <a:pPr/>
-              <a:t>21.04.2026</a:t>
+              <a:t>28.04.2026</a:t>
             </a:fld>
             <a:endParaRPr lang="de-DE"/>
           </a:p>
@@ -9826,7 +9128,7 @@
         </p:nvSpPr>
         <p:spPr>
           <a:xfrm>
-            <a:off x="0" y="1201297"/>
+            <a:off x="0" y="1573529"/>
             <a:ext cx="12191999" cy="2871537"/>
           </a:xfrm>
           <a:prstGeom prst="rect">
@@ -9979,7 +9281,7 @@
         </p:nvSpPr>
         <p:spPr>
           <a:xfrm>
-            <a:off x="1441808" y="992747"/>
+            <a:off x="1441808" y="1818131"/>
             <a:ext cx="9304962" cy="1195581"/>
           </a:xfrm>
         </p:spPr>
@@ -10018,8 +9320,8 @@
         </p:nvSpPr>
         <p:spPr>
           <a:xfrm>
-            <a:off x="1524000" y="2396879"/>
-            <a:ext cx="9144000" cy="4228366"/>
+            <a:off x="1524000" y="3382469"/>
+            <a:ext cx="9144000" cy="3615008"/>
           </a:xfrm>
         </p:spPr>
         <p:txBody>
@@ -10029,7 +9331,7 @@
           <a:lstStyle/>
           <a:p>
             <a:r>
-              <a:rPr lang="de-DE" b="1" dirty="0">
+              <a:rPr lang="de-DE" sz="2800" b="1" dirty="0">
                 <a:solidFill>
                   <a:schemeClr val="bg1"/>
                 </a:solidFill>
@@ -10037,29 +9339,7 @@
                 <a:ea typeface="Calibri Light" panose="020F0302020204030204" pitchFamily="34" charset="0"/>
                 <a:cs typeface="Calibri Light" panose="020F0302020204030204" pitchFamily="34" charset="0"/>
               </a:rPr>
-              <a:t>Welcher Personalisierungsgrad maximiert den Netto-Business-Value (Performance-Lift abzüglich Compliance-/Ethik-/Reputationsrisiken) unter DSGVO-</a:t>
-            </a:r>
-            <a:r>
-              <a:rPr lang="de-DE" b="1" dirty="0" err="1">
-                <a:solidFill>
-                  <a:schemeClr val="bg1"/>
-                </a:solidFill>
-                <a:latin typeface="Calibri Light" panose="020F0302020204030204" pitchFamily="34" charset="0"/>
-                <a:ea typeface="Calibri Light" panose="020F0302020204030204" pitchFamily="34" charset="0"/>
-                <a:cs typeface="Calibri Light" panose="020F0302020204030204" pitchFamily="34" charset="0"/>
-              </a:rPr>
-              <a:t>Constraints</a:t>
-            </a:r>
-            <a:r>
-              <a:rPr lang="de-DE" b="1" dirty="0">
-                <a:solidFill>
-                  <a:schemeClr val="bg1"/>
-                </a:solidFill>
-                <a:latin typeface="Calibri Light" panose="020F0302020204030204" pitchFamily="34" charset="0"/>
-                <a:ea typeface="Calibri Light" panose="020F0302020204030204" pitchFamily="34" charset="0"/>
-                <a:cs typeface="Calibri Light" panose="020F0302020204030204" pitchFamily="34" charset="0"/>
-              </a:rPr>
-              <a:t> — und ab welcher Schwelle kippt der Grenznutzen bzw. steigt das Risiko überproportional?</a:t>
+              <a:t>Wie individuell darf und sollte Kundenansprache sein?</a:t>
             </a:r>
           </a:p>
           <a:p>
@@ -10913,8 +10193,8 @@
           </a:p>
           <a:p>
             <a:pPr>
-              <a:buFont typeface="Symbol" panose="05050102010706020507" pitchFamily="18" charset="2"/>
-              <a:buChar char="-"/>
+              <a:buFont typeface="Wingdings" panose="05000000000000000000" pitchFamily="2" charset="2"/>
+              <a:buChar char="Ø"/>
             </a:pPr>
             <a:r>
               <a:rPr lang="de-DE" sz="1600" dirty="0">
@@ -10927,8 +10207,8 @@
           </a:p>
           <a:p>
             <a:pPr>
-              <a:buFont typeface="Symbol" panose="05050102010706020507" pitchFamily="18" charset="2"/>
-              <a:buChar char="-"/>
+              <a:buFont typeface="Wingdings" panose="05000000000000000000" pitchFamily="2" charset="2"/>
+              <a:buChar char="Ø"/>
             </a:pPr>
             <a:r>
               <a:rPr lang="de-DE" sz="1600" dirty="0">
@@ -10941,8 +10221,8 @@
           </a:p>
           <a:p>
             <a:pPr>
-              <a:buFont typeface="Symbol" panose="05050102010706020507" pitchFamily="18" charset="2"/>
-              <a:buChar char="-"/>
+              <a:buFont typeface="Wingdings" panose="05000000000000000000" pitchFamily="2" charset="2"/>
+              <a:buChar char="Ø"/>
             </a:pPr>
             <a:r>
               <a:rPr lang="de-DE" sz="1600" dirty="0">
@@ -11039,8 +10319,8 @@
           </a:p>
           <a:p>
             <a:pPr>
-              <a:buFont typeface="Symbol" panose="05050102010706020507" pitchFamily="18" charset="2"/>
-              <a:buChar char="-"/>
+              <a:buFont typeface="Wingdings" panose="05000000000000000000" pitchFamily="2" charset="2"/>
+              <a:buChar char="Ø"/>
             </a:pPr>
             <a:r>
               <a:rPr lang="de-DE" sz="1600" dirty="0">
@@ -11056,8 +10336,8 @@
               <a:spcAft>
                 <a:spcPts val="1200"/>
               </a:spcAft>
-              <a:buFont typeface="Symbol" panose="05050102010706020507" pitchFamily="18" charset="2"/>
-              <a:buChar char="-"/>
+              <a:buFont typeface="Wingdings" panose="05000000000000000000" pitchFamily="2" charset="2"/>
+              <a:buChar char="Ø"/>
             </a:pPr>
             <a:r>
               <a:rPr lang="de-DE" sz="1600" dirty="0">
@@ -11083,8 +10363,8 @@
           </a:p>
           <a:p>
             <a:pPr>
-              <a:buFont typeface="Symbol" panose="05050102010706020507" pitchFamily="18" charset="2"/>
-              <a:buChar char="-"/>
+              <a:buFont typeface="Wingdings" panose="05000000000000000000" pitchFamily="2" charset="2"/>
+              <a:buChar char="Ø"/>
             </a:pPr>
             <a:r>
               <a:rPr lang="de-DE" sz="1600" dirty="0" err="1">
@@ -11108,8 +10388,8 @@
               <a:spcAft>
                 <a:spcPts val="1200"/>
               </a:spcAft>
-              <a:buFont typeface="Symbol" panose="05050102010706020507" pitchFamily="18" charset="2"/>
-              <a:buChar char="-"/>
+              <a:buFont typeface="Wingdings" panose="05000000000000000000" pitchFamily="2" charset="2"/>
+              <a:buChar char="Ø"/>
             </a:pPr>
             <a:r>
               <a:rPr lang="de-DE" sz="1600" dirty="0">
@@ -11148,8 +10428,8 @@
           </a:p>
           <a:p>
             <a:pPr>
-              <a:buFont typeface="Symbol" panose="05050102010706020507" pitchFamily="18" charset="2"/>
-              <a:buChar char="-"/>
+              <a:buFont typeface="Wingdings" panose="05000000000000000000" pitchFamily="2" charset="2"/>
+              <a:buChar char="Ø"/>
             </a:pPr>
             <a:r>
               <a:rPr lang="de-DE" sz="1600" dirty="0">
@@ -11162,8 +10442,8 @@
           </a:p>
           <a:p>
             <a:pPr>
-              <a:buFont typeface="Symbol" panose="05050102010706020507" pitchFamily="18" charset="2"/>
-              <a:buChar char="-"/>
+              <a:buFont typeface="Wingdings" panose="05000000000000000000" pitchFamily="2" charset="2"/>
+              <a:buChar char="Ø"/>
             </a:pPr>
             <a:r>
               <a:rPr lang="de-DE" sz="1600" dirty="0">
@@ -11176,8 +10456,8 @@
           </a:p>
           <a:p>
             <a:pPr>
-              <a:buFont typeface="Symbol" panose="05050102010706020507" pitchFamily="18" charset="2"/>
-              <a:buChar char="-"/>
+              <a:buFont typeface="Wingdings" panose="05000000000000000000" pitchFamily="2" charset="2"/>
+              <a:buChar char="Ø"/>
             </a:pPr>
             <a:r>
               <a:rPr lang="de-DE" sz="1600" dirty="0">
@@ -11620,7 +10900,7 @@
         </p:nvSpPr>
         <p:spPr>
           <a:xfrm>
-            <a:off x="4727999" y="1977835"/>
+            <a:off x="4727999" y="2002111"/>
             <a:ext cx="2736000" cy="1660944"/>
           </a:xfrm>
           <a:prstGeom prst="rect">
@@ -12386,7 +11666,7 @@
           <p:nvPr>
             <p:extLst>
               <p:ext uri="{D42A27DB-BD31-4B8C-83A1-F6EECF244321}">
-                <p14:modId xmlns:p14="http://schemas.microsoft.com/office/powerpoint/2010/main" val="4121278701"/>
+                <p14:modId xmlns:p14="http://schemas.microsoft.com/office/powerpoint/2010/main" val="4021304553"/>
               </p:ext>
             </p:extLst>
           </p:nvPr>
@@ -12732,6 +12012,89 @@
           </a:p>
         </p:txBody>
       </p:sp>
+      <p:cxnSp>
+        <p:nvCxnSpPr>
+          <p:cNvPr id="7" name="Gerader Verbinder 6">
+            <a:extLst>
+              <a:ext uri="{FF2B5EF4-FFF2-40B4-BE49-F238E27FC236}">
+                <a16:creationId xmlns:a16="http://schemas.microsoft.com/office/drawing/2014/main" id="{6338ADDF-2394-C1AF-B36B-2EFD322B171A}"/>
+              </a:ext>
+            </a:extLst>
+          </p:cNvPr>
+          <p:cNvCxnSpPr/>
+          <p:nvPr/>
+        </p:nvCxnSpPr>
+        <p:spPr>
+          <a:xfrm>
+            <a:off x="6813494" y="3429000"/>
+            <a:ext cx="4633811" cy="0"/>
+          </a:xfrm>
+          <a:prstGeom prst="line">
+            <a:avLst/>
+          </a:prstGeom>
+          <a:ln w="12700">
+            <a:solidFill>
+              <a:schemeClr val="bg2">
+                <a:lumMod val="50000"/>
+              </a:schemeClr>
+            </a:solidFill>
+            <a:prstDash val="sysDash"/>
+          </a:ln>
+        </p:spPr>
+        <p:style>
+          <a:lnRef idx="2">
+            <a:schemeClr val="accent1"/>
+          </a:lnRef>
+          <a:fillRef idx="0">
+            <a:schemeClr val="accent1"/>
+          </a:fillRef>
+          <a:effectRef idx="1">
+            <a:schemeClr val="accent1"/>
+          </a:effectRef>
+          <a:fontRef idx="minor">
+            <a:schemeClr val="tx1"/>
+          </a:fontRef>
+        </p:style>
+      </p:cxnSp>
+      <p:sp>
+        <p:nvSpPr>
+          <p:cNvPr id="9" name="Textfeld 8">
+            <a:extLst>
+              <a:ext uri="{FF2B5EF4-FFF2-40B4-BE49-F238E27FC236}">
+                <a16:creationId xmlns:a16="http://schemas.microsoft.com/office/drawing/2014/main" id="{3B7E3B23-100F-B251-92AF-C96119B8E453}"/>
+              </a:ext>
+            </a:extLst>
+          </p:cNvPr>
+          <p:cNvSpPr txBox="1"/>
+          <p:nvPr/>
+        </p:nvSpPr>
+        <p:spPr>
+          <a:xfrm>
+            <a:off x="6804067" y="3224920"/>
+            <a:ext cx="1562027" cy="246221"/>
+          </a:xfrm>
+          <a:prstGeom prst="rect">
+            <a:avLst/>
+          </a:prstGeom>
+          <a:noFill/>
+        </p:spPr>
+        <p:txBody>
+          <a:bodyPr wrap="square" rtlCol="0">
+            <a:spAutoFit/>
+          </a:bodyPr>
+          <a:lstStyle/>
+          <a:p>
+            <a:r>
+              <a:rPr lang="de-DE" sz="1000" dirty="0">
+                <a:latin typeface="Calibri Light" panose="020F0302020204030204" pitchFamily="34" charset="0"/>
+                <a:ea typeface="Calibri Light" panose="020F0302020204030204" pitchFamily="34" charset="0"/>
+                <a:cs typeface="Calibri Light" panose="020F0302020204030204" pitchFamily="34" charset="0"/>
+              </a:rPr>
+              <a:t>Kritische Schwelle</a:t>
+            </a:r>
+          </a:p>
+        </p:txBody>
+      </p:sp>
     </p:spTree>
     <p:extLst>
       <p:ext uri="{BB962C8B-B14F-4D97-AF65-F5344CB8AC3E}">
@@ -13667,7 +13030,7 @@
           <p:cNvPr id="2" name="Titel 1">
             <a:extLst>
               <a:ext uri="{FF2B5EF4-FFF2-40B4-BE49-F238E27FC236}">
-                <a16:creationId xmlns:a16="http://schemas.microsoft.com/office/drawing/2014/main" id="{2C8A33D1-5019-5489-E66A-8C40862047B1}"/>
+                <a16:creationId xmlns:a16="http://schemas.microsoft.com/office/drawing/2014/main" id="{E3D07DFE-DF43-C790-FC0C-926B6730AE8B}"/>
               </a:ext>
             </a:extLst>
           </p:cNvPr>
@@ -13686,9 +13049,17 @@
           <a:lstStyle/>
           <a:p>
             <a:r>
-              <a:rPr lang="de-DE" sz="3600" dirty="0"/>
+              <a:rPr lang="de-DE" sz="4000" dirty="0"/>
               <a:t>EMPFEHLUNGEN FÜR UNTERNEHMEN</a:t>
             </a:r>
+            <a:br>
+              <a:rPr lang="de-DE" dirty="0"/>
+            </a:br>
+            <a:r>
+              <a:rPr lang="de-DE" sz="2800" dirty="0"/>
+              <a:t>CAMPAIGN OS STATT REINER PERSONALIERUNGS-ENGINE</a:t>
+            </a:r>
+            <a:endParaRPr lang="de-DE" dirty="0"/>
           </a:p>
         </p:txBody>
       </p:sp>
@@ -13697,7 +13068,7 @@
           <p:cNvPr id="3" name="Inhaltsplatzhalter 2">
             <a:extLst>
               <a:ext uri="{FF2B5EF4-FFF2-40B4-BE49-F238E27FC236}">
-                <a16:creationId xmlns:a16="http://schemas.microsoft.com/office/drawing/2014/main" id="{6FF47196-42C7-7017-135B-A8835683F804}"/>
+                <a16:creationId xmlns:a16="http://schemas.microsoft.com/office/drawing/2014/main" id="{2D92B17C-1554-BD3B-73C5-2EF8CE5720B6}"/>
               </a:ext>
             </a:extLst>
           </p:cNvPr>
@@ -13708,108 +13079,169 @@
             <p:ph idx="1"/>
           </p:nvPr>
         </p:nvSpPr>
-        <p:spPr/>
+        <p:spPr>
+          <a:xfrm>
+            <a:off x="838200" y="1690688"/>
+            <a:ext cx="10515600" cy="4486275"/>
+          </a:xfrm>
+        </p:spPr>
         <p:txBody>
           <a:bodyPr>
             <a:normAutofit/>
           </a:bodyPr>
           <a:lstStyle/>
           <a:p>
-            <a:pPr marL="514350" indent="-514350">
-              <a:lnSpc>
-                <a:spcPct val="150000"/>
-              </a:lnSpc>
-              <a:buFont typeface="+mj-lt"/>
-              <a:buAutoNum type="arabicPeriod"/>
+            <a:pPr marL="0" indent="0">
+              <a:buNone/>
             </a:pPr>
             <a:r>
-              <a:rPr lang="de-DE" sz="2400" dirty="0"/>
-              <a:t>Segmentbasierte Personalisierung als optimaler Einstieg</a:t>
-            </a:r>
-          </a:p>
-          <a:p>
-            <a:pPr marL="514350" indent="-514350">
-              <a:lnSpc>
-                <a:spcPct val="150000"/>
-              </a:lnSpc>
-              <a:buFont typeface="+mj-lt"/>
-              <a:buAutoNum type="arabicPeriod"/>
-            </a:pPr>
-            <a:r>
-              <a:rPr lang="de-DE" sz="2400" dirty="0"/>
-              <a:t>Individuelle Modelle nur unter klaren Rahmenbedingungen einsetzen</a:t>
-            </a:r>
-          </a:p>
-          <a:p>
-            <a:pPr marL="514350" indent="-514350">
-              <a:lnSpc>
-                <a:spcPct val="150000"/>
-              </a:lnSpc>
-              <a:buFont typeface="+mj-lt"/>
-              <a:buAutoNum type="arabicPeriod"/>
-            </a:pPr>
-            <a:r>
-              <a:rPr lang="de-DE" sz="2400" dirty="0"/>
-              <a:t>Datenschutz früh integrieren (Privacy </a:t>
-            </a:r>
-            <a:r>
-              <a:rPr lang="de-DE" sz="2400" dirty="0" err="1"/>
-              <a:t>by</a:t>
-            </a:r>
-            <a:r>
-              <a:rPr lang="de-DE" sz="2400" dirty="0"/>
-              <a:t> Design)</a:t>
-            </a:r>
-          </a:p>
-          <a:p>
-            <a:pPr marL="514350" indent="-514350">
-              <a:lnSpc>
-                <a:spcPct val="150000"/>
-              </a:lnSpc>
-              <a:buFont typeface="+mj-lt"/>
-              <a:buAutoNum type="arabicPeriod"/>
-            </a:pPr>
-            <a:r>
-              <a:rPr lang="de-DE" sz="2400" dirty="0"/>
-              <a:t>Transparenz gegenüber Nutzern erhöhen</a:t>
-            </a:r>
-          </a:p>
-          <a:p>
-            <a:pPr marL="514350" indent="-514350">
-              <a:lnSpc>
-                <a:spcPct val="150000"/>
-              </a:lnSpc>
-              <a:buFont typeface="+mj-lt"/>
-              <a:buAutoNum type="arabicPeriod"/>
-            </a:pPr>
-            <a:r>
-              <a:rPr lang="de-DE" sz="2400" dirty="0"/>
-              <a:t>Datensparsamkeit beachten</a:t>
+              <a:rPr lang="de-DE" sz="2000" b="1" dirty="0"/>
+              <a:t>Vision</a:t>
+            </a:r>
+            <a:r>
+              <a:rPr lang="de-DE" sz="2000" dirty="0">
+                <a:latin typeface="Calibri Light" panose="020F0302020204030204" pitchFamily="34" charset="0"/>
+                <a:ea typeface="Calibri Light" panose="020F0302020204030204" pitchFamily="34" charset="0"/>
+                <a:cs typeface="Calibri Light" panose="020F0302020204030204" pitchFamily="34" charset="0"/>
+              </a:rPr>
+              <a:t>: 	Ein SaaS, das aus Business-Ziel, Produkt und Datenlage direkt eine einsatzbare Kampagne 	erzeugt – inklusive steuerbarer Personalisierung und Risk Score!</a:t>
             </a:r>
           </a:p>
         </p:txBody>
       </p:sp>
-      <p:sp>
-        <p:nvSpPr>
-          <p:cNvPr id="4" name="Textfeld 3">
+      <p:pic>
+        <p:nvPicPr>
+          <p:cNvPr id="7" name="Grafik 6">
             <a:extLst>
               <a:ext uri="{FF2B5EF4-FFF2-40B4-BE49-F238E27FC236}">
-                <a16:creationId xmlns:a16="http://schemas.microsoft.com/office/drawing/2014/main" id="{D23EDD74-DFBE-E1B3-A423-66C9272DE77D}"/>
+                <a16:creationId xmlns:a16="http://schemas.microsoft.com/office/drawing/2014/main" id="{7D8D826B-934D-86D0-08F2-DA0CE12D52C2}"/>
               </a:ext>
             </a:extLst>
           </p:cNvPr>
-          <p:cNvSpPr txBox="1"/>
+          <p:cNvPicPr>
+            <a:picLocks noChangeAspect="1"/>
+          </p:cNvPicPr>
+          <p:nvPr/>
+        </p:nvPicPr>
+        <p:blipFill>
+          <a:blip r:embed="rId2">
+            <a:extLst>
+              <a:ext uri="{BEBA8EAE-BF5A-486C-A8C5-ECC9F3942E4B}">
+                <a14:imgProps xmlns:a14="http://schemas.microsoft.com/office/drawing/2010/main">
+                  <a14:imgLayer r:embed="rId3">
+                    <a14:imgEffect>
+                      <a14:backgroundRemoval t="4421" b="93750" l="3627" r="95596">
+                        <a14:foregroundMark x1="12824" y1="4421" x2="12824" y2="4421"/>
+                        <a14:foregroundMark x1="26684" y1="21799" x2="26684" y2="21799"/>
+                        <a14:foregroundMark x1="35363" y1="10976" x2="35363" y2="10976"/>
+                        <a14:foregroundMark x1="27979" y1="9299" x2="27979" y2="9299"/>
+                        <a14:foregroundMark x1="20466" y1="10976" x2="20466" y2="10976"/>
+                        <a14:foregroundMark x1="12565" y1="20274" x2="12565" y2="20274"/>
+                        <a14:foregroundMark x1="7513" y1="16159" x2="7513" y2="16159"/>
+                        <a14:foregroundMark x1="7642" y1="12805" x2="7642" y2="12805"/>
+                        <a14:foregroundMark x1="5959" y1="21799" x2="5959" y2="21799"/>
+                        <a14:foregroundMark x1="4663" y1="25610" x2="4663" y2="25610"/>
+                        <a14:foregroundMark x1="3886" y1="19360" x2="3886" y2="19360"/>
+                        <a14:foregroundMark x1="84326" y1="5030" x2="84326" y2="5030"/>
+                        <a14:foregroundMark x1="85104" y1="12957" x2="85104" y2="12957"/>
+                        <a14:foregroundMark x1="81347" y1="9299" x2="81347" y2="9299"/>
+                        <a14:foregroundMark x1="93912" y1="21189" x2="93912" y2="21189"/>
+                        <a14:foregroundMark x1="95725" y1="33841" x2="95725" y2="33841"/>
+                        <a14:foregroundMark x1="95337" y1="73323" x2="95337" y2="73323"/>
+                        <a14:foregroundMark x1="93653" y1="72713" x2="93653" y2="72713"/>
+                        <a14:foregroundMark x1="92228" y1="41921" x2="92228" y2="41921"/>
+                        <a14:foregroundMark x1="93394" y1="34909" x2="93394" y2="34909"/>
+                        <a14:foregroundMark x1="94560" y1="29116" x2="94560" y2="29116"/>
+                        <a14:foregroundMark x1="95337" y1="45732" x2="95337" y2="45732"/>
+                        <a14:foregroundMark x1="95337" y1="45732" x2="95337" y2="45732"/>
+                        <a14:foregroundMark x1="95725" y1="60366" x2="95725" y2="60366"/>
+                        <a14:foregroundMark x1="95725" y1="60366" x2="95725" y2="60366"/>
+                        <a14:foregroundMark x1="94171" y1="66463" x2="94171" y2="66463"/>
+                        <a14:foregroundMark x1="94171" y1="66463" x2="94171" y2="66463"/>
+                        <a14:foregroundMark x1="93653" y1="70884" x2="93653" y2="70884"/>
+                        <a14:foregroundMark x1="92876" y1="84604" x2="92876" y2="84604"/>
+                        <a14:foregroundMark x1="92876" y1="84604" x2="92876" y2="84604"/>
+                        <a14:foregroundMark x1="90155" y1="88262" x2="90155" y2="88262"/>
+                        <a14:foregroundMark x1="90155" y1="88262" x2="90155" y2="88262"/>
+                        <a14:foregroundMark x1="85881" y1="88415" x2="85881" y2="88415"/>
+                        <a14:foregroundMark x1="85881" y1="88415" x2="85881" y2="88415"/>
+                        <a14:foregroundMark x1="93782" y1="79573" x2="93782" y2="79573"/>
+                        <a14:foregroundMark x1="84585" y1="93750" x2="84585" y2="93750"/>
+                        <a14:foregroundMark x1="84585" y1="93750" x2="84585" y2="93750"/>
+                        <a14:foregroundMark x1="74611" y1="93445" x2="74611" y2="93445"/>
+                        <a14:foregroundMark x1="74611" y1="93445" x2="74611" y2="93445"/>
+                        <a14:foregroundMark x1="91321" y1="48628" x2="91321" y2="48628"/>
+                        <a14:foregroundMark x1="91321" y1="48628" x2="91321" y2="48628"/>
+                        <a14:foregroundMark x1="94689" y1="58841" x2="94689" y2="58841"/>
+                        <a14:foregroundMark x1="94689" y1="58841" x2="94689" y2="58841"/>
+                        <a14:foregroundMark x1="94301" y1="67835" x2="94301" y2="67835"/>
+                        <a14:foregroundMark x1="94301" y1="67835" x2="94301" y2="67835"/>
+                        <a14:foregroundMark x1="92228" y1="80488" x2="92228" y2="80488"/>
+                        <a14:foregroundMark x1="92228" y1="80488" x2="92228" y2="80488"/>
+                        <a14:foregroundMark x1="92228" y1="80488" x2="92228" y2="80488"/>
+                        <a14:foregroundMark x1="90803" y1="85518" x2="90803" y2="85518"/>
+                        <a14:foregroundMark x1="90803" y1="85518" x2="90803" y2="85518"/>
+                        <a14:foregroundMark x1="84974" y1="91921" x2="84974" y2="91921"/>
+                        <a14:foregroundMark x1="84974" y1="91921" x2="84974" y2="91921"/>
+                        <a14:foregroundMark x1="79922" y1="93445" x2="79922" y2="93445"/>
+                        <a14:foregroundMark x1="79922" y1="93445" x2="79922" y2="93445"/>
+                        <a14:foregroundMark x1="70725" y1="91768" x2="70725" y2="91768"/>
+                        <a14:foregroundMark x1="70725" y1="91768" x2="70725" y2="91768"/>
+                        <a14:foregroundMark x1="88860" y1="91768" x2="88860" y2="91768"/>
+                        <a14:foregroundMark x1="63342" y1="92988" x2="63342" y2="92988"/>
+                        <a14:foregroundMark x1="50130" y1="89482" x2="50130" y2="89482"/>
+                        <a14:foregroundMark x1="45337" y1="86128" x2="45337" y2="86128"/>
+                        <a14:foregroundMark x1="43264" y1="89024" x2="43264" y2="89024"/>
+                        <a14:foregroundMark x1="42228" y1="91006" x2="42228" y2="91006"/>
+                        <a14:foregroundMark x1="40415" y1="91311" x2="40415" y2="91311"/>
+                        <a14:foregroundMark x1="32513" y1="91311" x2="32513" y2="91311"/>
+                        <a14:foregroundMark x1="25907" y1="92683" x2="25907" y2="92683"/>
+                        <a14:foregroundMark x1="18394" y1="92835" x2="18394" y2="92835"/>
+                        <a14:foregroundMark x1="14249" y1="92226" x2="14249" y2="92226"/>
+                        <a14:foregroundMark x1="11788" y1="91311" x2="11788" y2="91311"/>
+                        <a14:foregroundMark x1="8679" y1="89787" x2="8679" y2="89787"/>
+                      </a14:backgroundRemoval>
+                    </a14:imgEffect>
+                  </a14:imgLayer>
+                </a14:imgProps>
+              </a:ext>
+            </a:extLst>
+          </a:blip>
+          <a:stretch>
+            <a:fillRect/>
+          </a:stretch>
+        </p:blipFill>
+        <p:spPr>
+          <a:xfrm>
+            <a:off x="7355660" y="2473441"/>
+            <a:ext cx="4362196" cy="3706736"/>
+          </a:xfrm>
+          <a:prstGeom prst="rect">
+            <a:avLst/>
+          </a:prstGeom>
+        </p:spPr>
+      </p:pic>
+      <p:sp>
+        <p:nvSpPr>
+          <p:cNvPr id="8" name="Rechteck 7">
+            <a:extLst>
+              <a:ext uri="{FF2B5EF4-FFF2-40B4-BE49-F238E27FC236}">
+                <a16:creationId xmlns:a16="http://schemas.microsoft.com/office/drawing/2014/main" id="{0B9BA9C4-71B5-C86C-F7E6-888E44E444DB}"/>
+              </a:ext>
+            </a:extLst>
+          </p:cNvPr>
+          <p:cNvSpPr/>
           <p:nvPr/>
         </p:nvSpPr>
         <p:spPr>
           <a:xfrm>
-            <a:off x="0" y="5598695"/>
-            <a:ext cx="12192000" cy="713206"/>
+            <a:off x="-1" y="2506941"/>
+            <a:ext cx="6991606" cy="2988886"/>
           </a:xfrm>
           <a:prstGeom prst="rect">
             <a:avLst/>
           </a:prstGeom>
-          <a:gradFill>
+          <a:gradFill flip="none" rotWithShape="1">
             <a:gsLst>
               <a:gs pos="0">
                 <a:schemeClr val="accent1">
@@ -13825,6 +13257,7 @@
               </a:gs>
             </a:gsLst>
             <a:lin ang="0" scaled="1"/>
+            <a:tileRect/>
           </a:gradFill>
           <a:ln>
             <a:noFill/>
@@ -13847,7 +13280,380 @@
           </a:fontRef>
         </p:style>
         <p:txBody>
+          <a:bodyPr lIns="612000" rtlCol="0" anchor="ctr"/>
+          <a:lstStyle/>
+          <a:p>
+            <a:pPr>
+              <a:spcAft>
+                <a:spcPts val="1200"/>
+              </a:spcAft>
+            </a:pPr>
+            <a:r>
+              <a:rPr lang="de-DE" dirty="0">
+                <a:latin typeface="Calibri" panose="020F0502020204030204" pitchFamily="34" charset="0"/>
+                <a:ea typeface="Calibri" panose="020F0502020204030204" pitchFamily="34" charset="0"/>
+                <a:cs typeface="Calibri" panose="020F0502020204030204" pitchFamily="34" charset="0"/>
+              </a:rPr>
+              <a:t>INPUT </a:t>
+            </a:r>
+            <a:r>
+              <a:rPr lang="de-DE" dirty="0">
+                <a:latin typeface="Calibri" panose="020F0502020204030204" pitchFamily="34" charset="0"/>
+                <a:ea typeface="Calibri" panose="020F0502020204030204" pitchFamily="34" charset="0"/>
+                <a:cs typeface="Calibri" panose="020F0502020204030204" pitchFamily="34" charset="0"/>
+                <a:sym typeface="Wingdings" panose="05000000000000000000" pitchFamily="2" charset="2"/>
+              </a:rPr>
+              <a:t> 		Reaktivierung, Neukunde, </a:t>
+            </a:r>
+            <a:r>
+              <a:rPr lang="de-DE" dirty="0" err="1">
+                <a:latin typeface="Calibri" panose="020F0502020204030204" pitchFamily="34" charset="0"/>
+                <a:ea typeface="Calibri" panose="020F0502020204030204" pitchFamily="34" charset="0"/>
+                <a:cs typeface="Calibri" panose="020F0502020204030204" pitchFamily="34" charset="0"/>
+                <a:sym typeface="Wingdings" panose="05000000000000000000" pitchFamily="2" charset="2"/>
+              </a:rPr>
+              <a:t>Upsell</a:t>
+            </a:r>
+            <a:r>
+              <a:rPr lang="de-DE" dirty="0">
+                <a:latin typeface="Calibri" panose="020F0502020204030204" pitchFamily="34" charset="0"/>
+                <a:ea typeface="Calibri" panose="020F0502020204030204" pitchFamily="34" charset="0"/>
+                <a:cs typeface="Calibri" panose="020F0502020204030204" pitchFamily="34" charset="0"/>
+                <a:sym typeface="Wingdings" panose="05000000000000000000" pitchFamily="2" charset="2"/>
+              </a:rPr>
+              <a:t> oder Cross-		Sell als Startpunkt definieren</a:t>
+            </a:r>
+          </a:p>
+          <a:p>
+            <a:pPr>
+              <a:spcAft>
+                <a:spcPts val="1200"/>
+              </a:spcAft>
+            </a:pPr>
+            <a:r>
+              <a:rPr lang="de-DE" dirty="0">
+                <a:latin typeface="Calibri" panose="020F0502020204030204" pitchFamily="34" charset="0"/>
+                <a:ea typeface="Calibri" panose="020F0502020204030204" pitchFamily="34" charset="0"/>
+                <a:cs typeface="Calibri" panose="020F0502020204030204" pitchFamily="34" charset="0"/>
+                <a:sym typeface="Wingdings" panose="05000000000000000000" pitchFamily="2" charset="2"/>
+              </a:rPr>
+              <a:t>OUTPUT 		KI erstellt Targeting, Ad Copy, Creatives und 		Kanalempfehlung automatisch</a:t>
+            </a:r>
+          </a:p>
+          <a:p>
+            <a:pPr>
+              <a:spcAft>
+                <a:spcPts val="1200"/>
+              </a:spcAft>
+            </a:pPr>
+            <a:r>
+              <a:rPr lang="de-DE" dirty="0">
+                <a:latin typeface="Calibri" panose="020F0502020204030204" pitchFamily="34" charset="0"/>
+                <a:ea typeface="Calibri" panose="020F0502020204030204" pitchFamily="34" charset="0"/>
+                <a:cs typeface="Calibri" panose="020F0502020204030204" pitchFamily="34" charset="0"/>
+                <a:sym typeface="Wingdings" panose="05000000000000000000" pitchFamily="2" charset="2"/>
+              </a:rPr>
+              <a:t>CONTROL		</a:t>
+            </a:r>
+            <a:r>
+              <a:rPr lang="de-DE" dirty="0" err="1">
+                <a:latin typeface="Calibri" panose="020F0502020204030204" pitchFamily="34" charset="0"/>
+                <a:ea typeface="Calibri" panose="020F0502020204030204" pitchFamily="34" charset="0"/>
+                <a:cs typeface="Calibri" panose="020F0502020204030204" pitchFamily="34" charset="0"/>
+                <a:sym typeface="Wingdings" panose="05000000000000000000" pitchFamily="2" charset="2"/>
+              </a:rPr>
+              <a:t>Personalization</a:t>
+            </a:r>
+            <a:r>
+              <a:rPr lang="de-DE" dirty="0">
+                <a:latin typeface="Calibri" panose="020F0502020204030204" pitchFamily="34" charset="0"/>
+                <a:ea typeface="Calibri" panose="020F0502020204030204" pitchFamily="34" charset="0"/>
+                <a:cs typeface="Calibri" panose="020F0502020204030204" pitchFamily="34" charset="0"/>
+                <a:sym typeface="Wingdings" panose="05000000000000000000" pitchFamily="2" charset="2"/>
+              </a:rPr>
+              <a:t>-Slider erhöht oder senkt 		Relevanz – der Risk Score reagiert mit</a:t>
+            </a:r>
+          </a:p>
+          <a:p>
+            <a:pPr>
+              <a:spcAft>
+                <a:spcPts val="1200"/>
+              </a:spcAft>
+            </a:pPr>
+            <a:r>
+              <a:rPr lang="de-DE" dirty="0">
+                <a:latin typeface="Calibri" panose="020F0502020204030204" pitchFamily="34" charset="0"/>
+                <a:ea typeface="Calibri" panose="020F0502020204030204" pitchFamily="34" charset="0"/>
+                <a:cs typeface="Calibri" panose="020F0502020204030204" pitchFamily="34" charset="0"/>
+                <a:sym typeface="Wingdings" panose="05000000000000000000" pitchFamily="2" charset="2"/>
+              </a:rPr>
+              <a:t>VALUE		Schnellere Kampagnenplanung bei konsistenter 		Qualität und klaren Compliance-Grenzen</a:t>
+            </a:r>
+            <a:endParaRPr lang="de-DE" dirty="0">
+              <a:latin typeface="Calibri" panose="020F0502020204030204" pitchFamily="34" charset="0"/>
+              <a:ea typeface="Calibri" panose="020F0502020204030204" pitchFamily="34" charset="0"/>
+              <a:cs typeface="Calibri" panose="020F0502020204030204" pitchFamily="34" charset="0"/>
+            </a:endParaRPr>
+          </a:p>
+        </p:txBody>
+      </p:sp>
+      <p:sp>
+        <p:nvSpPr>
+          <p:cNvPr id="9" name="Pfeil: nach rechts 8">
+            <a:extLst>
+              <a:ext uri="{FF2B5EF4-FFF2-40B4-BE49-F238E27FC236}">
+                <a16:creationId xmlns:a16="http://schemas.microsoft.com/office/drawing/2014/main" id="{16E53DF9-C0BB-3F36-452A-8B102F394A6B}"/>
+              </a:ext>
+            </a:extLst>
+          </p:cNvPr>
+          <p:cNvSpPr/>
+          <p:nvPr/>
+        </p:nvSpPr>
+        <p:spPr>
+          <a:xfrm>
+            <a:off x="1723604" y="2701148"/>
+            <a:ext cx="472424" cy="255113"/>
+          </a:xfrm>
+          <a:prstGeom prst="rightArrow">
+            <a:avLst/>
+          </a:prstGeom>
+          <a:solidFill>
+            <a:schemeClr val="bg1"/>
+          </a:solidFill>
+          <a:ln>
+            <a:noFill/>
+          </a:ln>
+        </p:spPr>
+        <p:style>
+          <a:lnRef idx="2">
+            <a:schemeClr val="accent1">
+              <a:shade val="15000"/>
+            </a:schemeClr>
+          </a:lnRef>
+          <a:fillRef idx="1">
+            <a:schemeClr val="accent1"/>
+          </a:fillRef>
+          <a:effectRef idx="0">
+            <a:schemeClr val="accent1"/>
+          </a:effectRef>
+          <a:fontRef idx="minor">
+            <a:schemeClr val="lt1"/>
+          </a:fontRef>
+        </p:style>
+        <p:txBody>
           <a:bodyPr rtlCol="0" anchor="ctr"/>
+          <a:lstStyle/>
+          <a:p>
+            <a:pPr algn="ctr"/>
+            <a:endParaRPr lang="de-DE"/>
+          </a:p>
+        </p:txBody>
+      </p:sp>
+      <p:sp>
+        <p:nvSpPr>
+          <p:cNvPr id="10" name="Pfeil: nach rechts 9">
+            <a:extLst>
+              <a:ext uri="{FF2B5EF4-FFF2-40B4-BE49-F238E27FC236}">
+                <a16:creationId xmlns:a16="http://schemas.microsoft.com/office/drawing/2014/main" id="{87011FB4-24B2-0F20-9AE2-146D04F01F0B}"/>
+              </a:ext>
+            </a:extLst>
+          </p:cNvPr>
+          <p:cNvSpPr/>
+          <p:nvPr/>
+        </p:nvSpPr>
+        <p:spPr>
+          <a:xfrm>
+            <a:off x="1723604" y="3374418"/>
+            <a:ext cx="472424" cy="255113"/>
+          </a:xfrm>
+          <a:prstGeom prst="rightArrow">
+            <a:avLst/>
+          </a:prstGeom>
+          <a:solidFill>
+            <a:schemeClr val="bg1"/>
+          </a:solidFill>
+          <a:ln>
+            <a:noFill/>
+          </a:ln>
+        </p:spPr>
+        <p:style>
+          <a:lnRef idx="2">
+            <a:schemeClr val="accent1">
+              <a:shade val="15000"/>
+            </a:schemeClr>
+          </a:lnRef>
+          <a:fillRef idx="1">
+            <a:schemeClr val="accent1"/>
+          </a:fillRef>
+          <a:effectRef idx="0">
+            <a:schemeClr val="accent1"/>
+          </a:effectRef>
+          <a:fontRef idx="minor">
+            <a:schemeClr val="lt1"/>
+          </a:fontRef>
+        </p:style>
+        <p:txBody>
+          <a:bodyPr rtlCol="0" anchor="ctr"/>
+          <a:lstStyle/>
+          <a:p>
+            <a:pPr algn="ctr"/>
+            <a:endParaRPr lang="de-DE"/>
+          </a:p>
+        </p:txBody>
+      </p:sp>
+      <p:sp>
+        <p:nvSpPr>
+          <p:cNvPr id="11" name="Pfeil: nach rechts 10">
+            <a:extLst>
+              <a:ext uri="{FF2B5EF4-FFF2-40B4-BE49-F238E27FC236}">
+                <a16:creationId xmlns:a16="http://schemas.microsoft.com/office/drawing/2014/main" id="{4A1CA1E4-264F-2C20-ADA2-10F23814FFA7}"/>
+              </a:ext>
+            </a:extLst>
+          </p:cNvPr>
+          <p:cNvSpPr/>
+          <p:nvPr/>
+        </p:nvSpPr>
+        <p:spPr>
+          <a:xfrm>
+            <a:off x="1725147" y="4090401"/>
+            <a:ext cx="472424" cy="255113"/>
+          </a:xfrm>
+          <a:prstGeom prst="rightArrow">
+            <a:avLst/>
+          </a:prstGeom>
+          <a:solidFill>
+            <a:schemeClr val="bg1"/>
+          </a:solidFill>
+          <a:ln>
+            <a:noFill/>
+          </a:ln>
+        </p:spPr>
+        <p:style>
+          <a:lnRef idx="2">
+            <a:schemeClr val="accent1">
+              <a:shade val="15000"/>
+            </a:schemeClr>
+          </a:lnRef>
+          <a:fillRef idx="1">
+            <a:schemeClr val="accent1"/>
+          </a:fillRef>
+          <a:effectRef idx="0">
+            <a:schemeClr val="accent1"/>
+          </a:effectRef>
+          <a:fontRef idx="minor">
+            <a:schemeClr val="lt1"/>
+          </a:fontRef>
+        </p:style>
+        <p:txBody>
+          <a:bodyPr rtlCol="0" anchor="ctr"/>
+          <a:lstStyle/>
+          <a:p>
+            <a:pPr algn="ctr"/>
+            <a:endParaRPr lang="de-DE"/>
+          </a:p>
+        </p:txBody>
+      </p:sp>
+      <p:sp>
+        <p:nvSpPr>
+          <p:cNvPr id="12" name="Pfeil: nach rechts 11">
+            <a:extLst>
+              <a:ext uri="{FF2B5EF4-FFF2-40B4-BE49-F238E27FC236}">
+                <a16:creationId xmlns:a16="http://schemas.microsoft.com/office/drawing/2014/main" id="{E10ABABF-758D-E8CA-2D68-4E984662D0F1}"/>
+              </a:ext>
+            </a:extLst>
+          </p:cNvPr>
+          <p:cNvSpPr/>
+          <p:nvPr/>
+        </p:nvSpPr>
+        <p:spPr>
+          <a:xfrm>
+            <a:off x="1723604" y="4788575"/>
+            <a:ext cx="472424" cy="255113"/>
+          </a:xfrm>
+          <a:prstGeom prst="rightArrow">
+            <a:avLst/>
+          </a:prstGeom>
+          <a:solidFill>
+            <a:schemeClr val="bg1"/>
+          </a:solidFill>
+          <a:ln>
+            <a:noFill/>
+          </a:ln>
+        </p:spPr>
+        <p:style>
+          <a:lnRef idx="2">
+            <a:schemeClr val="accent1">
+              <a:shade val="15000"/>
+            </a:schemeClr>
+          </a:lnRef>
+          <a:fillRef idx="1">
+            <a:schemeClr val="accent1"/>
+          </a:fillRef>
+          <a:effectRef idx="0">
+            <a:schemeClr val="accent1"/>
+          </a:effectRef>
+          <a:fontRef idx="minor">
+            <a:schemeClr val="lt1"/>
+          </a:fontRef>
+        </p:style>
+        <p:txBody>
+          <a:bodyPr rtlCol="0" anchor="ctr"/>
+          <a:lstStyle/>
+          <a:p>
+            <a:pPr algn="ctr"/>
+            <a:endParaRPr lang="de-DE"/>
+          </a:p>
+        </p:txBody>
+      </p:sp>
+      <p:sp>
+        <p:nvSpPr>
+          <p:cNvPr id="13" name="Textfeld 12">
+            <a:extLst>
+              <a:ext uri="{FF2B5EF4-FFF2-40B4-BE49-F238E27FC236}">
+                <a16:creationId xmlns:a16="http://schemas.microsoft.com/office/drawing/2014/main" id="{A55DE915-49E4-BFBE-BE00-BB114850DDBD}"/>
+              </a:ext>
+            </a:extLst>
+          </p:cNvPr>
+          <p:cNvSpPr txBox="1"/>
+          <p:nvPr/>
+        </p:nvSpPr>
+        <p:spPr>
+          <a:xfrm>
+            <a:off x="838201" y="5813281"/>
+            <a:ext cx="6153404" cy="695405"/>
+          </a:xfrm>
+          <a:prstGeom prst="rect">
+            <a:avLst/>
+          </a:prstGeom>
+          <a:solidFill>
+            <a:schemeClr val="bg1"/>
+          </a:solidFill>
+          <a:ln>
+            <a:solidFill>
+              <a:schemeClr val="accent1">
+                <a:shade val="15000"/>
+              </a:schemeClr>
+            </a:solidFill>
+          </a:ln>
+        </p:spPr>
+        <p:style>
+          <a:lnRef idx="2">
+            <a:schemeClr val="accent1">
+              <a:shade val="15000"/>
+            </a:schemeClr>
+          </a:lnRef>
+          <a:fillRef idx="1">
+            <a:schemeClr val="accent1"/>
+          </a:fillRef>
+          <a:effectRef idx="0">
+            <a:schemeClr val="accent1"/>
+          </a:effectRef>
+          <a:fontRef idx="minor">
+            <a:schemeClr val="lt1"/>
+          </a:fontRef>
+        </p:style>
+        <p:txBody>
+          <a:bodyPr lIns="144000" rtlCol="0" anchor="ctr"/>
           <a:lstStyle>
             <a:defPPr>
               <a:defRPr lang="de-DE"/>
@@ -13918,12 +13724,96 @@
           </a:lstStyle>
           <a:p>
             <a:r>
-              <a:rPr lang="de-DE" sz="2400" b="1" dirty="0">
+              <a:rPr lang="de-DE" dirty="0">
+                <a:solidFill>
+                  <a:schemeClr val="tx1"/>
+                </a:solidFill>
                 <a:latin typeface="Calibri" panose="020F0502020204030204" pitchFamily="34" charset="0"/>
                 <a:ea typeface="Calibri" panose="020F0502020204030204" pitchFamily="34" charset="0"/>
                 <a:cs typeface="Calibri" panose="020F0502020204030204" pitchFamily="34" charset="0"/>
               </a:rPr>
-              <a:t>Personalisierung nicht maximieren, sondern optimieren!!!</a:t>
+              <a:t>Nicht maximale Personalisierung gewinnt – sondern </a:t>
+            </a:r>
+            <a:br>
+              <a:rPr lang="de-DE" dirty="0">
+                <a:solidFill>
+                  <a:schemeClr val="tx1"/>
+                </a:solidFill>
+                <a:latin typeface="Calibri" panose="020F0502020204030204" pitchFamily="34" charset="0"/>
+                <a:ea typeface="Calibri" panose="020F0502020204030204" pitchFamily="34" charset="0"/>
+                <a:cs typeface="Calibri" panose="020F0502020204030204" pitchFamily="34" charset="0"/>
+              </a:rPr>
+            </a:br>
+            <a:r>
+              <a:rPr lang="de-DE" dirty="0">
+                <a:solidFill>
+                  <a:schemeClr val="tx1"/>
+                </a:solidFill>
+                <a:latin typeface="Calibri" panose="020F0502020204030204" pitchFamily="34" charset="0"/>
+                <a:ea typeface="Calibri" panose="020F0502020204030204" pitchFamily="34" charset="0"/>
+                <a:cs typeface="Calibri" panose="020F0502020204030204" pitchFamily="34" charset="0"/>
+              </a:rPr>
+              <a:t>steuerbare Performance innerhalb definierter Risiko-Grenzen!</a:t>
+            </a:r>
+          </a:p>
+        </p:txBody>
+      </p:sp>
+      <p:sp>
+        <p:nvSpPr>
+          <p:cNvPr id="14" name="Ellipse 13">
+            <a:extLst>
+              <a:ext uri="{FF2B5EF4-FFF2-40B4-BE49-F238E27FC236}">
+                <a16:creationId xmlns:a16="http://schemas.microsoft.com/office/drawing/2014/main" id="{439D3E58-EAE8-02D8-8EAE-B6DF904A905B}"/>
+              </a:ext>
+            </a:extLst>
+          </p:cNvPr>
+          <p:cNvSpPr/>
+          <p:nvPr/>
+        </p:nvSpPr>
+        <p:spPr>
+          <a:xfrm>
+            <a:off x="6826038" y="5633281"/>
+            <a:ext cx="324110" cy="360000"/>
+          </a:xfrm>
+          <a:prstGeom prst="ellipse">
+            <a:avLst/>
+          </a:prstGeom>
+          <a:solidFill>
+            <a:schemeClr val="tx1"/>
+          </a:solidFill>
+          <a:ln>
+            <a:noFill/>
+          </a:ln>
+        </p:spPr>
+        <p:style>
+          <a:lnRef idx="2">
+            <a:schemeClr val="accent1">
+              <a:shade val="15000"/>
+            </a:schemeClr>
+          </a:lnRef>
+          <a:fillRef idx="1">
+            <a:schemeClr val="accent1"/>
+          </a:fillRef>
+          <a:effectRef idx="0">
+            <a:schemeClr val="accent1"/>
+          </a:effectRef>
+          <a:fontRef idx="minor">
+            <a:schemeClr val="lt1"/>
+          </a:fontRef>
+        </p:style>
+        <p:txBody>
+          <a:bodyPr rtlCol="0" anchor="ctr"/>
+          <a:lstStyle/>
+          <a:p>
+            <a:pPr algn="ctr"/>
+            <a:r>
+              <a:rPr lang="de-DE" sz="3200" dirty="0">
+                <a:solidFill>
+                  <a:schemeClr val="bg1"/>
+                </a:solidFill>
+                <a:latin typeface="Blackadder ITC" panose="020F0502020204030204" pitchFamily="82" charset="0"/>
+              </a:rPr>
+              <a:t>i</a:t>
             </a:r>
           </a:p>
         </p:txBody>
@@ -13931,7 +13821,7 @@
     </p:spTree>
     <p:extLst>
       <p:ext uri="{BB962C8B-B14F-4D97-AF65-F5344CB8AC3E}">
-        <p14:creationId xmlns:p14="http://schemas.microsoft.com/office/powerpoint/2010/main" val="1250644840"/>
+        <p14:creationId xmlns:p14="http://schemas.microsoft.com/office/powerpoint/2010/main" val="162817948"/>
       </p:ext>
     </p:extLst>
   </p:cSld>
@@ -18474,7 +18364,7 @@
         </p:nvSpPr>
         <p:spPr>
           <a:xfrm>
-            <a:off x="10190375" y="1997893"/>
+            <a:off x="10214651" y="1997893"/>
             <a:ext cx="1474509" cy="1121978"/>
           </a:xfrm>
           <a:prstGeom prst="wedgeRectCallout">
